--- a/m3/diapositivos/sessao-05-m3-f09.pptx
+++ b/m3/diapositivos/sessao-05-m3-f09.pptx
@@ -4006,7 +4006,35 @@
                 <a:ea typeface="Arial" pitchFamily="34" charset="-122"/>
                 <a:cs typeface="Arial" pitchFamily="34" charset="-120"/>
               </a:rPr>
-              <a:t>Luís de Camões, Rhythmas (1595), soneto XIII (grafia modernizada).</a:t>
+              <a:t>Luís de Camões, </a:t>
+            </a:r>
+            <a:pPr indent="0" marL="0">
+              <a:buNone/>
+            </a:pPr>
+            <a:r>
+              <a:rPr lang="en-US" sz="1200" i="1" dirty="0">
+                <a:solidFill>
+                  <a:srgbClr val="A9A79F"/>
+                </a:solidFill>
+                <a:latin typeface="Arial" pitchFamily="34" charset="0"/>
+                <a:ea typeface="Arial" pitchFamily="34" charset="-122"/>
+                <a:cs typeface="Arial" pitchFamily="34" charset="-120"/>
+              </a:rPr>
+              <a:t>Rhythmas</a:t>
+            </a:r>
+            <a:pPr indent="0" marL="0">
+              <a:buNone/>
+            </a:pPr>
+            <a:r>
+              <a:rPr lang="en-US" sz="1200" dirty="0">
+                <a:solidFill>
+                  <a:srgbClr val="A9A79F"/>
+                </a:solidFill>
+                <a:latin typeface="Arial" pitchFamily="34" charset="0"/>
+                <a:ea typeface="Arial" pitchFamily="34" charset="-122"/>
+                <a:cs typeface="Arial" pitchFamily="34" charset="-120"/>
+              </a:rPr>
+              <a:t> (1595), soneto XIII (grafia modernizada).</a:t>
             </a:r>
             <a:endParaRPr lang="en-US" sz="1200" dirty="0"/>
           </a:p>
@@ -4446,7 +4474,35 @@
                 <a:ea typeface="Arial" pitchFamily="34" charset="-122"/>
                 <a:cs typeface="Arial" pitchFamily="34" charset="-120"/>
               </a:rPr>
-              <a:t>Luís de Camões, Rhythmas (1595), soneto XIII (grafia modernizada).</a:t>
+              <a:t>Luís de Camões, </a:t>
+            </a:r>
+            <a:pPr indent="0" marL="0">
+              <a:buNone/>
+            </a:pPr>
+            <a:r>
+              <a:rPr lang="en-US" sz="1200" i="1" dirty="0">
+                <a:solidFill>
+                  <a:srgbClr val="A9A79F"/>
+                </a:solidFill>
+                <a:latin typeface="Arial" pitchFamily="34" charset="0"/>
+                <a:ea typeface="Arial" pitchFamily="34" charset="-122"/>
+                <a:cs typeface="Arial" pitchFamily="34" charset="-120"/>
+              </a:rPr>
+              <a:t>Rhythmas</a:t>
+            </a:r>
+            <a:pPr indent="0" marL="0">
+              <a:buNone/>
+            </a:pPr>
+            <a:r>
+              <a:rPr lang="en-US" sz="1200" dirty="0">
+                <a:solidFill>
+                  <a:srgbClr val="A9A79F"/>
+                </a:solidFill>
+                <a:latin typeface="Arial" pitchFamily="34" charset="0"/>
+                <a:ea typeface="Arial" pitchFamily="34" charset="-122"/>
+                <a:cs typeface="Arial" pitchFamily="34" charset="-120"/>
+              </a:rPr>
+              <a:t> (1595), soneto XIII (grafia modernizada).</a:t>
             </a:r>
             <a:endParaRPr lang="en-US" sz="1200" dirty="0"/>
           </a:p>
